--- a/(3.25) 수수께끼(2), 라이벌, 희생자의 플롯.pptx
+++ b/(3.25) 수수께끼(2), 라이벌, 희생자의 플롯.pptx
@@ -14,6 +14,7 @@
     <p:sldId id="258" r:id="rId8"/>
     <p:sldId id="267" r:id="rId9"/>
     <p:sldId id="261" r:id="rId10"/>
+    <p:sldId id="268" r:id="rId11"/>
   </p:sldIdLst>
   <p:sldSz cx="12192000" cy="6858000"/>
   <p:notesSz cx="6858000" cy="9144000"/>
@@ -3122,6 +3123,108 @@
 </p:sld>
 </file>
 
+<file path=ppt/slides/slide10.xml><?xml version="1.0" encoding="utf-8"?>
+<p:sld xmlns:a="http://schemas.openxmlformats.org/drawingml/2006/main" xmlns:r="http://schemas.openxmlformats.org/officeDocument/2006/relationships" xmlns:p="http://schemas.openxmlformats.org/presentationml/2006/main">
+  <p:cSld>
+    <p:spTree>
+      <p:nvGrpSpPr>
+        <p:cNvPr id="1" name=""/>
+        <p:cNvGrpSpPr/>
+        <p:nvPr/>
+      </p:nvGrpSpPr>
+      <p:grpSpPr>
+        <a:xfrm>
+          <a:off x="0" y="0"/>
+          <a:ext cx="0" cy="0"/>
+          <a:chOff x="0" y="0"/>
+          <a:chExt cx="0" cy="0"/>
+        </a:xfrm>
+      </p:grpSpPr>
+      <p:sp>
+        <p:nvSpPr>
+          <p:cNvPr id="2" name="제목 1"/>
+          <p:cNvSpPr>
+            <a:spLocks noGrp="1"/>
+          </p:cNvSpPr>
+          <p:nvPr>
+            <p:ph type="title"/>
+          </p:nvPr>
+        </p:nvSpPr>
+        <p:spPr/>
+        <p:txBody>
+          <a:bodyPr/>
+          <a:lstStyle/>
+          <a:p>
+            <a:r>
+              <a:rPr lang="ko-KR" altLang="en-US" smtClean="0"/>
+              <a:t>플롯을 배우는 이유</a:t>
+            </a:r>
+            <a:endParaRPr lang="ko-KR" altLang="en-US"/>
+          </a:p>
+        </p:txBody>
+      </p:sp>
+      <p:sp>
+        <p:nvSpPr>
+          <p:cNvPr id="3" name="내용 개체 틀 2"/>
+          <p:cNvSpPr>
+            <a:spLocks noGrp="1"/>
+          </p:cNvSpPr>
+          <p:nvPr>
+            <p:ph idx="1"/>
+          </p:nvPr>
+        </p:nvSpPr>
+        <p:spPr/>
+        <p:txBody>
+          <a:bodyPr/>
+          <a:lstStyle/>
+          <a:p>
+            <a:r>
+              <a:rPr lang="ko-KR" altLang="en-US" smtClean="0"/>
+              <a:t>대중이 재밌어하는 이야기에 대한</a:t>
+            </a:r>
+            <a:endParaRPr lang="en-US" altLang="ko-KR" smtClean="0"/>
+          </a:p>
+          <a:p>
+            <a:r>
+              <a:rPr lang="ko-KR" altLang="en-US" smtClean="0"/>
+              <a:t>선배 작가들의 지침</a:t>
+            </a:r>
+            <a:r>
+              <a:rPr lang="en-US" altLang="ko-KR" smtClean="0"/>
+              <a:t>, </a:t>
+            </a:r>
+            <a:r>
+              <a:rPr lang="ko-KR" altLang="en-US" smtClean="0"/>
+              <a:t>방향을 알고</a:t>
+            </a:r>
+            <a:endParaRPr lang="en-US" altLang="ko-KR" smtClean="0"/>
+          </a:p>
+          <a:p>
+            <a:r>
+              <a:rPr lang="ko-KR" altLang="en-US" smtClean="0"/>
+              <a:t>그에 맞는 이야기를 만들어내기 위해서</a:t>
+            </a:r>
+            <a:r>
+              <a:rPr lang="en-US" altLang="ko-KR" smtClean="0"/>
+              <a:t>.</a:t>
+            </a:r>
+            <a:endParaRPr lang="ko-KR" altLang="en-US"/>
+          </a:p>
+        </p:txBody>
+      </p:sp>
+    </p:spTree>
+    <p:extLst>
+      <p:ext uri="{BB962C8B-B14F-4D97-AF65-F5344CB8AC3E}">
+        <p14:creationId xmlns:p14="http://schemas.microsoft.com/office/powerpoint/2010/main" val="1873900128"/>
+      </p:ext>
+    </p:extLst>
+  </p:cSld>
+  <p:clrMapOvr>
+    <a:masterClrMapping/>
+  </p:clrMapOvr>
+</p:sld>
+</file>
+
 <file path=ppt/slides/slide2.xml><?xml version="1.0" encoding="utf-8"?>
 <p:sld xmlns:a="http://schemas.openxmlformats.org/drawingml/2006/main" xmlns:r="http://schemas.openxmlformats.org/officeDocument/2006/relationships" xmlns:p="http://schemas.openxmlformats.org/presentationml/2006/main">
   <p:cSld>
@@ -3475,19 +3578,7 @@
             </a:br>
             <a:r>
               <a:rPr lang="ko-KR" altLang="en-US" smtClean="0"/>
-              <a:t>매그니토는 </a:t>
-            </a:r>
-            <a:r>
-              <a:rPr lang="ko-KR" altLang="en-US" smtClean="0"/>
-              <a:t>능력자들</a:t>
-            </a:r>
-            <a:r>
-              <a:rPr lang="ko-KR" altLang="en-US" smtClean="0"/>
-              <a:t>만의 </a:t>
-            </a:r>
-            <a:r>
-              <a:rPr lang="ko-KR" altLang="en-US" smtClean="0"/>
-              <a:t>평화를 지향</a:t>
+              <a:t>매그니토는 능력자들만의 평화를 지향</a:t>
             </a:r>
             <a:endParaRPr lang="en-US" altLang="ko-KR" smtClean="0"/>
           </a:p>
@@ -3916,11 +4007,7 @@
             </a:r>
             <a:r>
               <a:rPr lang="ko-KR" altLang="en-US" smtClean="0"/>
-              <a:t>그는 </a:t>
-            </a:r>
-            <a:r>
-              <a:rPr lang="ko-KR" altLang="en-US" smtClean="0"/>
-              <a:t>친구가 많을 수록 강해진다</a:t>
+              <a:t>그는 친구가 많을 수록 강해진다</a:t>
             </a:r>
             <a:r>
               <a:rPr lang="en-US" altLang="ko-KR" smtClean="0"/>
@@ -3942,15 +4029,7 @@
             </a:r>
             <a:r>
               <a:rPr lang="ko-KR" altLang="en-US" smtClean="0"/>
-              <a:t>초능력들의 머리를 </a:t>
-            </a:r>
-            <a:r>
-              <a:rPr lang="ko-KR" altLang="en-US" smtClean="0"/>
-              <a:t>잘라내 </a:t>
-            </a:r>
-            <a:r>
-              <a:rPr lang="ko-KR" altLang="en-US" smtClean="0"/>
-              <a:t>뇌를 관찰해서 능력자들의 능력을 획득하게 된다</a:t>
+              <a:t>초능력들의 머리를 잘라내 뇌를 관찰해서 능력자들의 능력을 획득하게 된다</a:t>
             </a:r>
             <a:r>
               <a:rPr lang="en-US" altLang="ko-KR" smtClean="0"/>
@@ -4340,11 +4419,7 @@
             </a:r>
             <a:r>
               <a:rPr lang="ko-KR" altLang="en-US" smtClean="0"/>
-              <a:t> </a:t>
-            </a:r>
-            <a:r>
-              <a:rPr lang="ko-KR" altLang="en-US" smtClean="0"/>
-              <a:t>사이에서 갈등한다</a:t>
+              <a:t> 사이에서 갈등한다</a:t>
             </a:r>
             <a:r>
               <a:rPr lang="en-US" altLang="ko-KR" smtClean="0"/>
